--- a/assets/files/26.03.30.세미나.pptx
+++ b/assets/files/26.03.30.세미나.pptx
@@ -5,13 +5,14 @@
     <p:sldMasterId id="2147483648" r:id="rId1"/>
   </p:sldMasterIdLst>
   <p:notesMasterIdLst>
-    <p:notesMasterId r:id="rId6"/>
+    <p:notesMasterId r:id="rId7"/>
   </p:notesMasterIdLst>
   <p:sldIdLst>
     <p:sldId id="579" r:id="rId2"/>
-    <p:sldId id="628" r:id="rId3"/>
-    <p:sldId id="629" r:id="rId4"/>
-    <p:sldId id="636" r:id="rId5"/>
+    <p:sldId id="634" r:id="rId3"/>
+    <p:sldId id="628" r:id="rId4"/>
+    <p:sldId id="629" r:id="rId5"/>
+    <p:sldId id="636" r:id="rId6"/>
   </p:sldIdLst>
   <p:sldSz cx="12192000" cy="6858000"/>
   <p:notesSz cx="7099300" cy="10234613"/>
@@ -249,7 +250,7 @@
       <p15:sldGuideLst xmlns:p15="http://schemas.microsoft.com/office/powerpoint/2012/main"/>
     </p:ext>
     <p:ext uri="http://customooxmlschemas.google.com/">
-      <go:slidesCustomData xmlns:go="http://customooxmlschemas.google.com/" xmlns:ahyp="http://schemas.microsoft.com/office/drawing/2018/hyperlinkcolor" xmlns:p15="http://schemas.microsoft.com/office/powerpoint/2012/main" xmlns:p14="http://schemas.microsoft.com/office/powerpoint/2010/main" xmlns:com="http://schemas.openxmlformats.org/drawingml/2006/compatibility" xmlns:pvml="urn:schemas-microsoft-com:office:powerpoint" xmlns:v="urn:schemas-microsoft-com:vml" xmlns:o="urn:schemas-microsoft-com:office:office" xmlns:dgm="http://schemas.openxmlformats.org/drawingml/2006/diagram" xmlns:c="http://schemas.openxmlformats.org/drawingml/2006/chart" xmlns:mv="urn:schemas-microsoft-com:mac:vml" xmlns:mc="http://schemas.openxmlformats.org/markup-compatibility/2006" xmlns="" r:id="rId119" roundtripDataSignature="AMtx7mi60wwQBXdufn43yw7rgc2Btalb6Q=="/>
+      <go:slidesCustomData xmlns="" xmlns:mc="http://schemas.openxmlformats.org/markup-compatibility/2006" xmlns:mv="urn:schemas-microsoft-com:mac:vml" xmlns:c="http://schemas.openxmlformats.org/drawingml/2006/chart" xmlns:dgm="http://schemas.openxmlformats.org/drawingml/2006/diagram" xmlns:o="urn:schemas-microsoft-com:office:office" xmlns:v="urn:schemas-microsoft-com:vml" xmlns:pvml="urn:schemas-microsoft-com:office:powerpoint" xmlns:com="http://schemas.openxmlformats.org/drawingml/2006/compatibility" xmlns:p14="http://schemas.microsoft.com/office/powerpoint/2010/main" xmlns:p15="http://schemas.microsoft.com/office/powerpoint/2012/main" xmlns:ahyp="http://schemas.microsoft.com/office/drawing/2018/hyperlinkcolor" xmlns:go="http://customooxmlschemas.google.com/" r:id="rId119" roundtripDataSignature="AMtx7mi60wwQBXdufn43yw7rgc2Btalb6Q=="/>
     </p:ext>
   </p:extLst>
 </p:presentation>
@@ -258,7 +259,7 @@
 <file path=ppt/revisionInfo.xml><?xml version="1.0" encoding="utf-8"?>
 <p1510:revInfo xmlns:a="http://schemas.openxmlformats.org/drawingml/2006/main" xmlns:r="http://schemas.openxmlformats.org/officeDocument/2006/relationships" xmlns:p1510="http://schemas.microsoft.com/office/powerpoint/2015/10/main">
   <p1510:revLst>
-    <p1510:client id="{E371119B-C670-4028-B161-2B7D3D298A30}" v="80" dt="2026-03-29T19:25:29.757"/>
+    <p1510:client id="{B21C66E8-7A9A-4D2C-83C4-ED0281212C19}" v="2" dt="2026-05-19T17:40:21.578"/>
   </p1510:revLst>
 </p1510:revInfo>
 </file>
@@ -268,737 +269,24 @@
   <pc:docChgLst>
     <pc:chgData name="성우 최" userId="b39b9c6800b01a47" providerId="LiveId" clId="{86918D44-C542-442D-8291-F46EC03904AF}"/>
     <pc:docChg chg="undo custSel addSld delSld modSld">
-      <pc:chgData name="성우 최" userId="b39b9c6800b01a47" providerId="LiveId" clId="{86918D44-C542-442D-8291-F46EC03904AF}" dt="2026-03-30T05:06:54.366" v="989" actId="14100"/>
+      <pc:chgData name="성우 최" userId="b39b9c6800b01a47" providerId="LiveId" clId="{86918D44-C542-442D-8291-F46EC03904AF}" dt="2026-05-19T17:40:24.562" v="1038" actId="20577"/>
       <pc:docMkLst>
         <pc:docMk/>
       </pc:docMkLst>
-      <pc:sldChg chg="addSp delSp modSp mod setBg">
-        <pc:chgData name="성우 최" userId="b39b9c6800b01a47" providerId="LiveId" clId="{86918D44-C542-442D-8291-F46EC03904AF}" dt="2026-03-29T18:48:26.825" v="487" actId="1076"/>
+      <pc:sldChg chg="modSp add mod">
+        <pc:chgData name="성우 최" userId="b39b9c6800b01a47" providerId="LiveId" clId="{86918D44-C542-442D-8291-F46EC03904AF}" dt="2026-05-19T17:40:24.562" v="1038" actId="20577"/>
         <pc:sldMkLst>
           <pc:docMk/>
-          <pc:sldMk cId="1720874513" sldId="628"/>
+          <pc:sldMk cId="846647448" sldId="634"/>
         </pc:sldMkLst>
-        <pc:spChg chg="add del mod">
-          <ac:chgData name="성우 최" userId="b39b9c6800b01a47" providerId="LiveId" clId="{86918D44-C542-442D-8291-F46EC03904AF}" dt="2026-03-29T18:44:50.137" v="304" actId="478"/>
+        <pc:spChg chg="mod">
+          <ac:chgData name="성우 최" userId="b39b9c6800b01a47" providerId="LiveId" clId="{86918D44-C542-442D-8291-F46EC03904AF}" dt="2026-05-19T17:40:24.562" v="1038" actId="20577"/>
           <ac:spMkLst>
             <pc:docMk/>
-            <pc:sldMk cId="1720874513" sldId="628"/>
-            <ac:spMk id="3" creationId="{41206417-9389-10E6-6C44-0BEED08E44EB}"/>
-          </ac:spMkLst>
-        </pc:spChg>
-        <pc:spChg chg="del mod">
-          <ac:chgData name="성우 최" userId="b39b9c6800b01a47" providerId="LiveId" clId="{86918D44-C542-442D-8291-F46EC03904AF}" dt="2026-03-29T18:41:48.269" v="141" actId="478"/>
-          <ac:spMkLst>
-            <pc:docMk/>
-            <pc:sldMk cId="1720874513" sldId="628"/>
+            <pc:sldMk cId="846647448" sldId="634"/>
             <ac:spMk id="6" creationId="{EBE37C29-BE2D-02B2-CB82-F09AB08495B9}"/>
           </ac:spMkLst>
         </pc:spChg>
-        <pc:spChg chg="add del mod">
-          <ac:chgData name="성우 최" userId="b39b9c6800b01a47" providerId="LiveId" clId="{86918D44-C542-442D-8291-F46EC03904AF}" dt="2026-03-29T18:44:51.526" v="305" actId="478"/>
-          <ac:spMkLst>
-            <pc:docMk/>
-            <pc:sldMk cId="1720874513" sldId="628"/>
-            <ac:spMk id="7" creationId="{BCA635CF-63CD-A4AB-CCD6-73C7EFE0C2E2}"/>
-          </ac:spMkLst>
-        </pc:spChg>
-        <pc:spChg chg="add del mod">
-          <ac:chgData name="성우 최" userId="b39b9c6800b01a47" providerId="LiveId" clId="{86918D44-C542-442D-8291-F46EC03904AF}" dt="2026-03-29T18:44:53.017" v="306" actId="478"/>
-          <ac:spMkLst>
-            <pc:docMk/>
-            <pc:sldMk cId="1720874513" sldId="628"/>
-            <ac:spMk id="8" creationId="{187C653F-945A-CBAC-A347-C9BF86E57CD7}"/>
-          </ac:spMkLst>
-        </pc:spChg>
-        <pc:spChg chg="add del mod">
-          <ac:chgData name="성우 최" userId="b39b9c6800b01a47" providerId="LiveId" clId="{86918D44-C542-442D-8291-F46EC03904AF}" dt="2026-03-29T18:44:08.730" v="222" actId="478"/>
-          <ac:spMkLst>
-            <pc:docMk/>
-            <pc:sldMk cId="1720874513" sldId="628"/>
-            <ac:spMk id="9" creationId="{74FBBAC1-A05F-C68F-522C-8101BB48E55C}"/>
-          </ac:spMkLst>
-        </pc:spChg>
-        <pc:spChg chg="add mod">
-          <ac:chgData name="성우 최" userId="b39b9c6800b01a47" providerId="LiveId" clId="{86918D44-C542-442D-8291-F46EC03904AF}" dt="2026-03-29T18:45:04.011" v="308" actId="1076"/>
-          <ac:spMkLst>
-            <pc:docMk/>
-            <pc:sldMk cId="1720874513" sldId="628"/>
-            <ac:spMk id="10" creationId="{D0225485-4760-1B95-20FB-85DBA1741090}"/>
-          </ac:spMkLst>
-        </pc:spChg>
-        <pc:spChg chg="add del mod">
-          <ac:chgData name="성우 최" userId="b39b9c6800b01a47" providerId="LiveId" clId="{86918D44-C542-442D-8291-F46EC03904AF}" dt="2026-03-29T18:44:13.196" v="223" actId="478"/>
-          <ac:spMkLst>
-            <pc:docMk/>
-            <pc:sldMk cId="1720874513" sldId="628"/>
-            <ac:spMk id="11" creationId="{778F72F1-1F74-AF8E-9ED9-E84FBDE31320}"/>
-          </ac:spMkLst>
-        </pc:spChg>
-        <pc:spChg chg="add mod">
-          <ac:chgData name="성우 최" userId="b39b9c6800b01a47" providerId="LiveId" clId="{86918D44-C542-442D-8291-F46EC03904AF}" dt="2026-03-29T18:44:59.896" v="307" actId="1076"/>
-          <ac:spMkLst>
-            <pc:docMk/>
-            <pc:sldMk cId="1720874513" sldId="628"/>
-            <ac:spMk id="12" creationId="{DF3C6BC7-3821-864E-EB0B-BE2E8954C96E}"/>
-          </ac:spMkLst>
-        </pc:spChg>
-        <pc:spChg chg="add mod">
-          <ac:chgData name="성우 최" userId="b39b9c6800b01a47" providerId="LiveId" clId="{86918D44-C542-442D-8291-F46EC03904AF}" dt="2026-03-29T18:45:08.324" v="309" actId="1076"/>
-          <ac:spMkLst>
-            <pc:docMk/>
-            <pc:sldMk cId="1720874513" sldId="628"/>
-            <ac:spMk id="13" creationId="{DD81E7D8-2DD2-D81C-1C0C-428074AD33B5}"/>
-          </ac:spMkLst>
-        </pc:spChg>
-        <pc:spChg chg="add mod">
-          <ac:chgData name="성우 최" userId="b39b9c6800b01a47" providerId="LiveId" clId="{86918D44-C542-442D-8291-F46EC03904AF}" dt="2026-03-29T18:47:04.068" v="388" actId="20577"/>
-          <ac:spMkLst>
-            <pc:docMk/>
-            <pc:sldMk cId="1720874513" sldId="628"/>
-            <ac:spMk id="18" creationId="{CF1B6ABF-A603-4F18-E56D-B5F465FA993D}"/>
-          </ac:spMkLst>
-        </pc:spChg>
-        <pc:spChg chg="add mod">
-          <ac:chgData name="성우 최" userId="b39b9c6800b01a47" providerId="LiveId" clId="{86918D44-C542-442D-8291-F46EC03904AF}" dt="2026-03-29T18:47:15.400" v="430" actId="20577"/>
-          <ac:spMkLst>
-            <pc:docMk/>
-            <pc:sldMk cId="1720874513" sldId="628"/>
-            <ac:spMk id="19" creationId="{3F27F326-B37E-20F6-05B8-4E8B2882CB07}"/>
-          </ac:spMkLst>
-        </pc:spChg>
-        <pc:spChg chg="add mod">
-          <ac:chgData name="성우 최" userId="b39b9c6800b01a47" providerId="LiveId" clId="{86918D44-C542-442D-8291-F46EC03904AF}" dt="2026-03-29T18:46:38.218" v="347" actId="14100"/>
-          <ac:spMkLst>
-            <pc:docMk/>
-            <pc:sldMk cId="1720874513" sldId="628"/>
-            <ac:spMk id="24" creationId="{1F7CD408-7413-CAB9-76A8-4D98331BB709}"/>
-          </ac:spMkLst>
-        </pc:spChg>
-        <pc:spChg chg="add mod">
-          <ac:chgData name="성우 최" userId="b39b9c6800b01a47" providerId="LiveId" clId="{86918D44-C542-442D-8291-F46EC03904AF}" dt="2026-03-29T18:46:50.169" v="351" actId="20577"/>
-          <ac:spMkLst>
-            <pc:docMk/>
-            <pc:sldMk cId="1720874513" sldId="628"/>
-            <ac:spMk id="25" creationId="{0D64B3C8-7DB9-0F8A-3F06-DECA4EF4C532}"/>
-          </ac:spMkLst>
-        </pc:spChg>
-        <pc:spChg chg="add mod">
-          <ac:chgData name="성우 최" userId="b39b9c6800b01a47" providerId="LiveId" clId="{86918D44-C542-442D-8291-F46EC03904AF}" dt="2026-03-29T18:47:34.211" v="431"/>
-          <ac:spMkLst>
-            <pc:docMk/>
-            <pc:sldMk cId="1720874513" sldId="628"/>
-            <ac:spMk id="26" creationId="{BB9DE660-4A48-07FE-1A6F-97D3BBFDBCCB}"/>
-          </ac:spMkLst>
-        </pc:spChg>
-        <pc:spChg chg="add mod">
-          <ac:chgData name="성우 최" userId="b39b9c6800b01a47" providerId="LiveId" clId="{86918D44-C542-442D-8291-F46EC03904AF}" dt="2026-03-29T18:48:26.825" v="487" actId="1076"/>
-          <ac:spMkLst>
-            <pc:docMk/>
-            <pc:sldMk cId="1720874513" sldId="628"/>
-            <ac:spMk id="27" creationId="{17ECCE78-C0E2-CC6C-DD9F-69680AF619AB}"/>
-          </ac:spMkLst>
-        </pc:spChg>
-        <pc:cxnChg chg="add del">
-          <ac:chgData name="성우 최" userId="b39b9c6800b01a47" providerId="LiveId" clId="{86918D44-C542-442D-8291-F46EC03904AF}" dt="2026-03-29T18:39:56.733" v="40" actId="11529"/>
-          <ac:cxnSpMkLst>
-            <pc:docMk/>
-            <pc:sldMk cId="1720874513" sldId="628"/>
-            <ac:cxnSpMk id="5" creationId="{41B93B3A-3E25-74C8-71FB-22C770EEC29C}"/>
-          </ac:cxnSpMkLst>
-        </pc:cxnChg>
-        <pc:cxnChg chg="add mod">
-          <ac:chgData name="성우 최" userId="b39b9c6800b01a47" providerId="LiveId" clId="{86918D44-C542-442D-8291-F46EC03904AF}" dt="2026-03-29T18:45:25.532" v="311" actId="208"/>
-          <ac:cxnSpMkLst>
-            <pc:docMk/>
-            <pc:sldMk cId="1720874513" sldId="628"/>
-            <ac:cxnSpMk id="15" creationId="{8577B8CF-80A0-7920-2B74-1A01D8B747A7}"/>
-          </ac:cxnSpMkLst>
-        </pc:cxnChg>
-        <pc:cxnChg chg="add mod">
-          <ac:chgData name="성우 최" userId="b39b9c6800b01a47" providerId="LiveId" clId="{86918D44-C542-442D-8291-F46EC03904AF}" dt="2026-03-29T18:45:37.069" v="313" actId="208"/>
-          <ac:cxnSpMkLst>
-            <pc:docMk/>
-            <pc:sldMk cId="1720874513" sldId="628"/>
-            <ac:cxnSpMk id="17" creationId="{326BCF92-4A5B-B850-9A0A-907458CF8CCD}"/>
-          </ac:cxnSpMkLst>
-        </pc:cxnChg>
-        <pc:cxnChg chg="add">
-          <ac:chgData name="성우 최" userId="b39b9c6800b01a47" providerId="LiveId" clId="{86918D44-C542-442D-8291-F46EC03904AF}" dt="2026-03-29T18:46:06.951" v="318" actId="11529"/>
-          <ac:cxnSpMkLst>
-            <pc:docMk/>
-            <pc:sldMk cId="1720874513" sldId="628"/>
-            <ac:cxnSpMk id="21" creationId="{8BAF2C84-7A14-8E60-C441-F0410170BB91}"/>
-          </ac:cxnSpMkLst>
-        </pc:cxnChg>
-        <pc:cxnChg chg="add">
-          <ac:chgData name="성우 최" userId="b39b9c6800b01a47" providerId="LiveId" clId="{86918D44-C542-442D-8291-F46EC03904AF}" dt="2026-03-29T18:46:13.413" v="319" actId="11529"/>
-          <ac:cxnSpMkLst>
-            <pc:docMk/>
-            <pc:sldMk cId="1720874513" sldId="628"/>
-            <ac:cxnSpMk id="23" creationId="{99AD3E1A-1DF4-1262-3F1F-05F7AD046297}"/>
-          </ac:cxnSpMkLst>
-        </pc:cxnChg>
-        <pc:cxnChg chg="add mod">
-          <ac:chgData name="성우 최" userId="b39b9c6800b01a47" providerId="LiveId" clId="{86918D44-C542-442D-8291-F46EC03904AF}" dt="2026-03-29T18:48:26.825" v="487" actId="1076"/>
-          <ac:cxnSpMkLst>
-            <pc:docMk/>
-            <pc:sldMk cId="1720874513" sldId="628"/>
-            <ac:cxnSpMk id="29" creationId="{CB49B0E3-1B35-C0B9-34A7-FA7D41D75AD9}"/>
-          </ac:cxnSpMkLst>
-        </pc:cxnChg>
-        <pc:cxnChg chg="add mod">
-          <ac:chgData name="성우 최" userId="b39b9c6800b01a47" providerId="LiveId" clId="{86918D44-C542-442D-8291-F46EC03904AF}" dt="2026-03-29T18:48:26.825" v="487" actId="1076"/>
-          <ac:cxnSpMkLst>
-            <pc:docMk/>
-            <pc:sldMk cId="1720874513" sldId="628"/>
-            <ac:cxnSpMk id="31" creationId="{6C22A649-7087-53F2-5F6D-B347030B04D2}"/>
-          </ac:cxnSpMkLst>
-        </pc:cxnChg>
-      </pc:sldChg>
-      <pc:sldChg chg="addSp delSp modSp mod">
-        <pc:chgData name="성우 최" userId="b39b9c6800b01a47" providerId="LiveId" clId="{86918D44-C542-442D-8291-F46EC03904AF}" dt="2026-03-30T05:06:42.691" v="988" actId="14100"/>
-        <pc:sldMkLst>
-          <pc:docMk/>
-          <pc:sldMk cId="3187522303" sldId="629"/>
-        </pc:sldMkLst>
-        <pc:spChg chg="mod">
-          <ac:chgData name="성우 최" userId="b39b9c6800b01a47" providerId="LiveId" clId="{86918D44-C542-442D-8291-F46EC03904AF}" dt="2026-03-29T18:48:41.342" v="507" actId="20577"/>
-          <ac:spMkLst>
-            <pc:docMk/>
-            <pc:sldMk cId="3187522303" sldId="629"/>
-            <ac:spMk id="2" creationId="{3389B28A-039C-54D9-2F43-753442A3F313}"/>
-          </ac:spMkLst>
-        </pc:spChg>
-        <pc:spChg chg="del mod">
-          <ac:chgData name="성우 최" userId="b39b9c6800b01a47" providerId="LiveId" clId="{86918D44-C542-442D-8291-F46EC03904AF}" dt="2026-03-29T19:05:44.127" v="617" actId="478"/>
-          <ac:spMkLst>
-            <pc:docMk/>
-            <pc:sldMk cId="3187522303" sldId="629"/>
-            <ac:spMk id="6" creationId="{D20C229F-53A0-8D7C-884E-CF9849A2755E}"/>
-          </ac:spMkLst>
-        </pc:spChg>
-        <pc:spChg chg="add del">
-          <ac:chgData name="성우 최" userId="b39b9c6800b01a47" providerId="LiveId" clId="{86918D44-C542-442D-8291-F46EC03904AF}" dt="2026-03-29T18:59:49.370" v="540" actId="478"/>
-          <ac:spMkLst>
-            <pc:docMk/>
-            <pc:sldMk cId="3187522303" sldId="629"/>
-            <ac:spMk id="8" creationId="{0F04E09E-7C1B-206B-5B83-4CA5061B74CE}"/>
-          </ac:spMkLst>
-        </pc:spChg>
-        <pc:spChg chg="add del mod">
-          <ac:chgData name="성우 최" userId="b39b9c6800b01a47" providerId="LiveId" clId="{86918D44-C542-442D-8291-F46EC03904AF}" dt="2026-03-29T19:09:19.086" v="676"/>
-          <ac:spMkLst>
-            <pc:docMk/>
-            <pc:sldMk cId="3187522303" sldId="629"/>
-            <ac:spMk id="28" creationId="{D1F8A6AE-1E43-E29F-CAAA-9D24CBF2F30A}"/>
-          </ac:spMkLst>
-        </pc:spChg>
-        <pc:spChg chg="add mod">
-          <ac:chgData name="성우 최" userId="b39b9c6800b01a47" providerId="LiveId" clId="{86918D44-C542-442D-8291-F46EC03904AF}" dt="2026-03-29T19:09:27.344" v="680" actId="14100"/>
-          <ac:spMkLst>
-            <pc:docMk/>
-            <pc:sldMk cId="3187522303" sldId="629"/>
-            <ac:spMk id="29" creationId="{E772764C-3A14-A584-0525-F5A93B2961E9}"/>
-          </ac:spMkLst>
-        </pc:spChg>
-        <pc:spChg chg="add mod">
-          <ac:chgData name="성우 최" userId="b39b9c6800b01a47" providerId="LiveId" clId="{86918D44-C542-442D-8291-F46EC03904AF}" dt="2026-03-29T19:17:22.557" v="774" actId="14100"/>
-          <ac:spMkLst>
-            <pc:docMk/>
-            <pc:sldMk cId="3187522303" sldId="629"/>
-            <ac:spMk id="30" creationId="{DCAB33D0-3E7F-53EB-C527-A3C12F2B2DBE}"/>
-          </ac:spMkLst>
-        </pc:spChg>
-        <pc:spChg chg="add mod">
-          <ac:chgData name="성우 최" userId="b39b9c6800b01a47" providerId="LiveId" clId="{86918D44-C542-442D-8291-F46EC03904AF}" dt="2026-03-29T19:17:25.526" v="778" actId="20577"/>
-          <ac:spMkLst>
-            <pc:docMk/>
-            <pc:sldMk cId="3187522303" sldId="629"/>
-            <ac:spMk id="31" creationId="{C4828FEC-EACF-B8B0-2D58-819FEAC4CA83}"/>
-          </ac:spMkLst>
-        </pc:spChg>
-        <pc:spChg chg="add mod">
-          <ac:chgData name="성우 최" userId="b39b9c6800b01a47" providerId="LiveId" clId="{86918D44-C542-442D-8291-F46EC03904AF}" dt="2026-03-29T19:17:35.412" v="784" actId="14100"/>
-          <ac:spMkLst>
-            <pc:docMk/>
-            <pc:sldMk cId="3187522303" sldId="629"/>
-            <ac:spMk id="32" creationId="{3DC26DD8-C0DD-4962-D1CA-0714741CC3B3}"/>
-          </ac:spMkLst>
-        </pc:spChg>
-        <pc:spChg chg="add mod">
-          <ac:chgData name="성우 최" userId="b39b9c6800b01a47" providerId="LiveId" clId="{86918D44-C542-442D-8291-F46EC03904AF}" dt="2026-03-29T19:11:30.185" v="698" actId="1076"/>
-          <ac:spMkLst>
-            <pc:docMk/>
-            <pc:sldMk cId="3187522303" sldId="629"/>
-            <ac:spMk id="33" creationId="{EDCF6548-D473-319F-F92E-AC537BCB27D8}"/>
-          </ac:spMkLst>
-        </pc:spChg>
-        <pc:spChg chg="add mod">
-          <ac:chgData name="성우 최" userId="b39b9c6800b01a47" providerId="LiveId" clId="{86918D44-C542-442D-8291-F46EC03904AF}" dt="2026-03-29T19:17:47.859" v="790" actId="14100"/>
-          <ac:spMkLst>
-            <pc:docMk/>
-            <pc:sldMk cId="3187522303" sldId="629"/>
-            <ac:spMk id="34" creationId="{32DD6C15-6912-0216-3901-2CB61C7814AC}"/>
-          </ac:spMkLst>
-        </pc:spChg>
-        <pc:spChg chg="add del mod">
-          <ac:chgData name="성우 최" userId="b39b9c6800b01a47" providerId="LiveId" clId="{86918D44-C542-442D-8291-F46EC03904AF}" dt="2026-03-29T19:17:54.424" v="796" actId="20577"/>
-          <ac:spMkLst>
-            <pc:docMk/>
-            <pc:sldMk cId="3187522303" sldId="629"/>
-            <ac:spMk id="35" creationId="{F3B7A653-B722-041B-A8DF-F546F85497A7}"/>
-          </ac:spMkLst>
-        </pc:spChg>
-        <pc:spChg chg="add mod">
-          <ac:chgData name="성우 최" userId="b39b9c6800b01a47" providerId="LiveId" clId="{86918D44-C542-442D-8291-F46EC03904AF}" dt="2026-03-29T19:18:01.793" v="802" actId="14100"/>
-          <ac:spMkLst>
-            <pc:docMk/>
-            <pc:sldMk cId="3187522303" sldId="629"/>
-            <ac:spMk id="36" creationId="{1DC3E6D5-FEFE-FA32-1B56-9BED5AFC75E6}"/>
-          </ac:spMkLst>
-        </pc:spChg>
-        <pc:spChg chg="add mod">
-          <ac:chgData name="성우 최" userId="b39b9c6800b01a47" providerId="LiveId" clId="{86918D44-C542-442D-8291-F46EC03904AF}" dt="2026-03-29T19:11:39.498" v="700" actId="1076"/>
-          <ac:spMkLst>
-            <pc:docMk/>
-            <pc:sldMk cId="3187522303" sldId="629"/>
-            <ac:spMk id="37" creationId="{63D86540-0466-8DEB-C506-11D139EB6DD3}"/>
-          </ac:spMkLst>
-        </pc:spChg>
-        <pc:spChg chg="add mod">
-          <ac:chgData name="성우 최" userId="b39b9c6800b01a47" providerId="LiveId" clId="{86918D44-C542-442D-8291-F46EC03904AF}" dt="2026-03-29T19:11:39.498" v="700" actId="1076"/>
-          <ac:spMkLst>
-            <pc:docMk/>
-            <pc:sldMk cId="3187522303" sldId="629"/>
-            <ac:spMk id="38" creationId="{93303C0C-A839-76BE-48FC-F4EDC8633431}"/>
-          </ac:spMkLst>
-        </pc:spChg>
-        <pc:spChg chg="add mod">
-          <ac:chgData name="성우 최" userId="b39b9c6800b01a47" providerId="LiveId" clId="{86918D44-C542-442D-8291-F46EC03904AF}" dt="2026-03-29T19:11:39.498" v="700" actId="1076"/>
-          <ac:spMkLst>
-            <pc:docMk/>
-            <pc:sldMk cId="3187522303" sldId="629"/>
-            <ac:spMk id="39" creationId="{6D1B7C18-44C6-8BD2-B86F-658B47A40413}"/>
-          </ac:spMkLst>
-        </pc:spChg>
-        <pc:spChg chg="add mod">
-          <ac:chgData name="성우 최" userId="b39b9c6800b01a47" providerId="LiveId" clId="{86918D44-C542-442D-8291-F46EC03904AF}" dt="2026-03-29T19:11:39.498" v="700" actId="1076"/>
-          <ac:spMkLst>
-            <pc:docMk/>
-            <pc:sldMk cId="3187522303" sldId="629"/>
-            <ac:spMk id="40" creationId="{B129ACAA-4973-405F-556A-24F1323DD68C}"/>
-          </ac:spMkLst>
-        </pc:spChg>
-        <pc:spChg chg="add mod">
-          <ac:chgData name="성우 최" userId="b39b9c6800b01a47" providerId="LiveId" clId="{86918D44-C542-442D-8291-F46EC03904AF}" dt="2026-03-29T19:11:47.124" v="702" actId="1076"/>
-          <ac:spMkLst>
-            <pc:docMk/>
-            <pc:sldMk cId="3187522303" sldId="629"/>
-            <ac:spMk id="41" creationId="{3E595B7F-96E6-00FA-EE1B-4BBD43149F4B}"/>
-          </ac:spMkLst>
-        </pc:spChg>
-        <pc:spChg chg="add mod">
-          <ac:chgData name="성우 최" userId="b39b9c6800b01a47" providerId="LiveId" clId="{86918D44-C542-442D-8291-F46EC03904AF}" dt="2026-03-29T19:11:47.124" v="702" actId="1076"/>
-          <ac:spMkLst>
-            <pc:docMk/>
-            <pc:sldMk cId="3187522303" sldId="629"/>
-            <ac:spMk id="42" creationId="{23A8AFAB-854E-A544-E550-A9B48BDD67D5}"/>
-          </ac:spMkLst>
-        </pc:spChg>
-        <pc:spChg chg="add mod">
-          <ac:chgData name="성우 최" userId="b39b9c6800b01a47" providerId="LiveId" clId="{86918D44-C542-442D-8291-F46EC03904AF}" dt="2026-03-29T19:11:47.124" v="702" actId="1076"/>
-          <ac:spMkLst>
-            <pc:docMk/>
-            <pc:sldMk cId="3187522303" sldId="629"/>
-            <ac:spMk id="43" creationId="{1CC5E587-E356-4ED3-6C1D-5E79906D2CD0}"/>
-          </ac:spMkLst>
-        </pc:spChg>
-        <pc:spChg chg="add mod">
-          <ac:chgData name="성우 최" userId="b39b9c6800b01a47" providerId="LiveId" clId="{86918D44-C542-442D-8291-F46EC03904AF}" dt="2026-03-29T19:11:47.124" v="702" actId="1076"/>
-          <ac:spMkLst>
-            <pc:docMk/>
-            <pc:sldMk cId="3187522303" sldId="629"/>
-            <ac:spMk id="44" creationId="{431E6A53-4D83-E182-CF55-A0AAEDF6C448}"/>
-          </ac:spMkLst>
-        </pc:spChg>
-        <pc:spChg chg="add mod">
-          <ac:chgData name="성우 최" userId="b39b9c6800b01a47" providerId="LiveId" clId="{86918D44-C542-442D-8291-F46EC03904AF}" dt="2026-03-29T19:25:05.248" v="931" actId="1076"/>
-          <ac:spMkLst>
-            <pc:docMk/>
-            <pc:sldMk cId="3187522303" sldId="629"/>
-            <ac:spMk id="50" creationId="{D88EEF3D-F9DD-1EAD-94C2-8457D06AB38B}"/>
-          </ac:spMkLst>
-        </pc:spChg>
-        <pc:spChg chg="add mod">
-          <ac:chgData name="성우 최" userId="b39b9c6800b01a47" providerId="LiveId" clId="{86918D44-C542-442D-8291-F46EC03904AF}" dt="2026-03-29T19:25:14.409" v="933" actId="1076"/>
-          <ac:spMkLst>
-            <pc:docMk/>
-            <pc:sldMk cId="3187522303" sldId="629"/>
-            <ac:spMk id="51" creationId="{3BEC67DC-F798-ECF5-01B3-53E8EF0281AD}"/>
-          </ac:spMkLst>
-        </pc:spChg>
-        <pc:graphicFrameChg chg="add del mod modGraphic">
-          <ac:chgData name="성우 최" userId="b39b9c6800b01a47" providerId="LiveId" clId="{86918D44-C542-442D-8291-F46EC03904AF}" dt="2026-03-29T18:59:25.995" v="535" actId="478"/>
-          <ac:graphicFrameMkLst>
-            <pc:docMk/>
-            <pc:sldMk cId="3187522303" sldId="629"/>
-            <ac:graphicFrameMk id="3" creationId="{5D0C75DC-BF11-8CD3-0485-8E4E3DF520FD}"/>
-          </ac:graphicFrameMkLst>
-        </pc:graphicFrameChg>
-        <pc:graphicFrameChg chg="add del mod">
-          <ac:chgData name="성우 최" userId="b39b9c6800b01a47" providerId="LiveId" clId="{86918D44-C542-442D-8291-F46EC03904AF}" dt="2026-03-29T18:59:27.957" v="536" actId="478"/>
-          <ac:graphicFrameMkLst>
-            <pc:docMk/>
-            <pc:sldMk cId="3187522303" sldId="629"/>
-            <ac:graphicFrameMk id="4" creationId="{1F4ACC02-D396-DCE8-D0E2-71832CF52177}"/>
-          </ac:graphicFrameMkLst>
-        </pc:graphicFrameChg>
-        <pc:graphicFrameChg chg="add del mod">
-          <ac:chgData name="성우 최" userId="b39b9c6800b01a47" providerId="LiveId" clId="{86918D44-C542-442D-8291-F46EC03904AF}" dt="2026-03-29T18:59:30.247" v="537" actId="478"/>
-          <ac:graphicFrameMkLst>
-            <pc:docMk/>
-            <pc:sldMk cId="3187522303" sldId="629"/>
-            <ac:graphicFrameMk id="5" creationId="{411B39F3-4DAF-DDC8-1018-EC51E4A10E87}"/>
-          </ac:graphicFrameMkLst>
-        </pc:graphicFrameChg>
-        <pc:graphicFrameChg chg="add del mod">
-          <ac:chgData name="성우 최" userId="b39b9c6800b01a47" providerId="LiveId" clId="{86918D44-C542-442D-8291-F46EC03904AF}" dt="2026-03-29T18:59:31.696" v="538" actId="478"/>
-          <ac:graphicFrameMkLst>
-            <pc:docMk/>
-            <pc:sldMk cId="3187522303" sldId="629"/>
-            <ac:graphicFrameMk id="7" creationId="{AF13ABA0-5AB6-8FBD-133D-9A2510BE64B5}"/>
-          </ac:graphicFrameMkLst>
-        </pc:graphicFrameChg>
-        <pc:graphicFrameChg chg="add del mod modGraphic">
-          <ac:chgData name="성우 최" userId="b39b9c6800b01a47" providerId="LiveId" clId="{86918D44-C542-442D-8291-F46EC03904AF}" dt="2026-03-29T19:17:01.634" v="767" actId="20577"/>
-          <ac:graphicFrameMkLst>
-            <pc:docMk/>
-            <pc:sldMk cId="3187522303" sldId="629"/>
-            <ac:graphicFrameMk id="9" creationId="{29484106-8C51-1657-3B59-75AF89CA59CA}"/>
-          </ac:graphicFrameMkLst>
-        </pc:graphicFrameChg>
-        <pc:graphicFrameChg chg="add del mod modGraphic">
-          <ac:chgData name="성우 최" userId="b39b9c6800b01a47" providerId="LiveId" clId="{86918D44-C542-442D-8291-F46EC03904AF}" dt="2026-03-29T19:05:07.589" v="604" actId="478"/>
-          <ac:graphicFrameMkLst>
-            <pc:docMk/>
-            <pc:sldMk cId="3187522303" sldId="629"/>
-            <ac:graphicFrameMk id="10" creationId="{6F131B2C-2D73-53FD-2E79-5FE58B80A756}"/>
-          </ac:graphicFrameMkLst>
-        </pc:graphicFrameChg>
-        <pc:graphicFrameChg chg="add del mod">
-          <ac:chgData name="성우 최" userId="b39b9c6800b01a47" providerId="LiveId" clId="{86918D44-C542-442D-8291-F46EC03904AF}" dt="2026-03-29T19:05:09.535" v="605" actId="478"/>
-          <ac:graphicFrameMkLst>
-            <pc:docMk/>
-            <pc:sldMk cId="3187522303" sldId="629"/>
-            <ac:graphicFrameMk id="11" creationId="{7F46FF60-0D72-F1A5-48D6-E2DD8A8BA0C1}"/>
-          </ac:graphicFrameMkLst>
-        </pc:graphicFrameChg>
-        <pc:graphicFrameChg chg="add del mod">
-          <ac:chgData name="성우 최" userId="b39b9c6800b01a47" providerId="LiveId" clId="{86918D44-C542-442D-8291-F46EC03904AF}" dt="2026-03-29T19:05:11.704" v="606" actId="478"/>
-          <ac:graphicFrameMkLst>
-            <pc:docMk/>
-            <pc:sldMk cId="3187522303" sldId="629"/>
-            <ac:graphicFrameMk id="12" creationId="{51C6E54B-4341-6129-1324-E9C84936FB5F}"/>
-          </ac:graphicFrameMkLst>
-        </pc:graphicFrameChg>
-        <pc:graphicFrameChg chg="add mod modGraphic">
-          <ac:chgData name="성우 최" userId="b39b9c6800b01a47" providerId="LiveId" clId="{86918D44-C542-442D-8291-F46EC03904AF}" dt="2026-03-29T19:19:30.625" v="812" actId="20577"/>
-          <ac:graphicFrameMkLst>
-            <pc:docMk/>
-            <pc:sldMk cId="3187522303" sldId="629"/>
-            <ac:graphicFrameMk id="13" creationId="{B8CC281C-3A7A-7A60-8805-295C8EBA06FE}"/>
-          </ac:graphicFrameMkLst>
-        </pc:graphicFrameChg>
-        <pc:graphicFrameChg chg="add mod modGraphic">
-          <ac:chgData name="성우 최" userId="b39b9c6800b01a47" providerId="LiveId" clId="{86918D44-C542-442D-8291-F46EC03904AF}" dt="2026-03-29T19:20:05.205" v="828" actId="207"/>
-          <ac:graphicFrameMkLst>
-            <pc:docMk/>
-            <pc:sldMk cId="3187522303" sldId="629"/>
-            <ac:graphicFrameMk id="14" creationId="{22C4FE56-7463-D545-8348-AB6622590955}"/>
-          </ac:graphicFrameMkLst>
-        </pc:graphicFrameChg>
-        <pc:graphicFrameChg chg="add mod modGraphic">
-          <ac:chgData name="성우 최" userId="b39b9c6800b01a47" providerId="LiveId" clId="{86918D44-C542-442D-8291-F46EC03904AF}" dt="2026-03-29T19:20:27.024" v="837" actId="207"/>
-          <ac:graphicFrameMkLst>
-            <pc:docMk/>
-            <pc:sldMk cId="3187522303" sldId="629"/>
-            <ac:graphicFrameMk id="15" creationId="{18916255-DA5D-76D1-2443-8A3DCCF265D9}"/>
-          </ac:graphicFrameMkLst>
-        </pc:graphicFrameChg>
-        <pc:graphicFrameChg chg="add mod modGraphic">
-          <ac:chgData name="성우 최" userId="b39b9c6800b01a47" providerId="LiveId" clId="{86918D44-C542-442D-8291-F46EC03904AF}" dt="2026-03-29T19:20:39.557" v="841"/>
-          <ac:graphicFrameMkLst>
-            <pc:docMk/>
-            <pc:sldMk cId="3187522303" sldId="629"/>
-            <ac:graphicFrameMk id="16" creationId="{D91BE0A2-B757-1C6B-0CF5-C7F575A7FFA5}"/>
-          </ac:graphicFrameMkLst>
-        </pc:graphicFrameChg>
-        <pc:graphicFrameChg chg="add mod modGraphic">
-          <ac:chgData name="성우 최" userId="b39b9c6800b01a47" providerId="LiveId" clId="{86918D44-C542-442D-8291-F46EC03904AF}" dt="2026-03-29T19:20:45.921" v="842"/>
-          <ac:graphicFrameMkLst>
-            <pc:docMk/>
-            <pc:sldMk cId="3187522303" sldId="629"/>
-            <ac:graphicFrameMk id="17" creationId="{0F3CDCB8-5187-C1A0-6CE5-28A65A32B0E9}"/>
-          </ac:graphicFrameMkLst>
-        </pc:graphicFrameChg>
-        <pc:graphicFrameChg chg="add mod modGraphic">
-          <ac:chgData name="성우 최" userId="b39b9c6800b01a47" providerId="LiveId" clId="{86918D44-C542-442D-8291-F46EC03904AF}" dt="2026-03-29T19:20:51.276" v="843"/>
-          <ac:graphicFrameMkLst>
-            <pc:docMk/>
-            <pc:sldMk cId="3187522303" sldId="629"/>
-            <ac:graphicFrameMk id="18" creationId="{B8A677F1-B653-8372-EDBB-48E95565E02D}"/>
-          </ac:graphicFrameMkLst>
-        </pc:graphicFrameChg>
-        <pc:graphicFrameChg chg="add mod modGraphic">
-          <ac:chgData name="성우 최" userId="b39b9c6800b01a47" providerId="LiveId" clId="{86918D44-C542-442D-8291-F46EC03904AF}" dt="2026-03-29T19:20:56.183" v="844"/>
-          <ac:graphicFrameMkLst>
-            <pc:docMk/>
-            <pc:sldMk cId="3187522303" sldId="629"/>
-            <ac:graphicFrameMk id="19" creationId="{A8AFEA75-A4BD-1345-5570-BE7410A9C506}"/>
-          </ac:graphicFrameMkLst>
-        </pc:graphicFrameChg>
-        <pc:graphicFrameChg chg="add mod modGraphic">
-          <ac:chgData name="성우 최" userId="b39b9c6800b01a47" providerId="LiveId" clId="{86918D44-C542-442D-8291-F46EC03904AF}" dt="2026-03-29T19:14:34.948" v="739" actId="3064"/>
-          <ac:graphicFrameMkLst>
-            <pc:docMk/>
-            <pc:sldMk cId="3187522303" sldId="629"/>
-            <ac:graphicFrameMk id="20" creationId="{A1303A98-E845-2777-CF09-A2FACA353481}"/>
-          </ac:graphicFrameMkLst>
-        </pc:graphicFrameChg>
-        <pc:graphicFrameChg chg="add mod modGraphic">
-          <ac:chgData name="성우 최" userId="b39b9c6800b01a47" providerId="LiveId" clId="{86918D44-C542-442D-8291-F46EC03904AF}" dt="2026-03-29T19:14:43.560" v="742" actId="3064"/>
-          <ac:graphicFrameMkLst>
-            <pc:docMk/>
-            <pc:sldMk cId="3187522303" sldId="629"/>
-            <ac:graphicFrameMk id="21" creationId="{4F796B55-5D0C-0CE3-4320-84AE5730EFCE}"/>
-          </ac:graphicFrameMkLst>
-        </pc:graphicFrameChg>
-        <pc:graphicFrameChg chg="add mod modGraphic">
-          <ac:chgData name="성우 최" userId="b39b9c6800b01a47" providerId="LiveId" clId="{86918D44-C542-442D-8291-F46EC03904AF}" dt="2026-03-29T19:14:48.274" v="743" actId="3064"/>
-          <ac:graphicFrameMkLst>
-            <pc:docMk/>
-            <pc:sldMk cId="3187522303" sldId="629"/>
-            <ac:graphicFrameMk id="22" creationId="{A2D94A4C-0F7D-DD85-1A3E-0E64A7FCCB85}"/>
-          </ac:graphicFrameMkLst>
-        </pc:graphicFrameChg>
-        <pc:graphicFrameChg chg="add mod modGraphic">
-          <ac:chgData name="성우 최" userId="b39b9c6800b01a47" providerId="LiveId" clId="{86918D44-C542-442D-8291-F46EC03904AF}" dt="2026-03-29T19:14:53.304" v="744" actId="3064"/>
-          <ac:graphicFrameMkLst>
-            <pc:docMk/>
-            <pc:sldMk cId="3187522303" sldId="629"/>
-            <ac:graphicFrameMk id="23" creationId="{3770A419-2C56-BCE1-BC9F-66A1FACA9CF1}"/>
-          </ac:graphicFrameMkLst>
-        </pc:graphicFrameChg>
-        <pc:graphicFrameChg chg="add mod modGraphic">
-          <ac:chgData name="성우 최" userId="b39b9c6800b01a47" providerId="LiveId" clId="{86918D44-C542-442D-8291-F46EC03904AF}" dt="2026-03-29T19:14:57.915" v="745" actId="3064"/>
-          <ac:graphicFrameMkLst>
-            <pc:docMk/>
-            <pc:sldMk cId="3187522303" sldId="629"/>
-            <ac:graphicFrameMk id="24" creationId="{01DA5D55-B623-A0DA-C66A-48D5F22ED401}"/>
-          </ac:graphicFrameMkLst>
-        </pc:graphicFrameChg>
-        <pc:graphicFrameChg chg="add mod modGraphic">
-          <ac:chgData name="성우 최" userId="b39b9c6800b01a47" providerId="LiveId" clId="{86918D44-C542-442D-8291-F46EC03904AF}" dt="2026-03-29T19:15:03.615" v="746" actId="3064"/>
-          <ac:graphicFrameMkLst>
-            <pc:docMk/>
-            <pc:sldMk cId="3187522303" sldId="629"/>
-            <ac:graphicFrameMk id="25" creationId="{53502295-04D2-D065-4335-4AAC2CA415A3}"/>
-          </ac:graphicFrameMkLst>
-        </pc:graphicFrameChg>
-        <pc:graphicFrameChg chg="add mod modGraphic">
-          <ac:chgData name="성우 최" userId="b39b9c6800b01a47" providerId="LiveId" clId="{86918D44-C542-442D-8291-F46EC03904AF}" dt="2026-03-29T19:15:08.233" v="747" actId="3064"/>
-          <ac:graphicFrameMkLst>
-            <pc:docMk/>
-            <pc:sldMk cId="3187522303" sldId="629"/>
-            <ac:graphicFrameMk id="26" creationId="{72D70538-F370-221B-B029-63A6FFAD8D46}"/>
-          </ac:graphicFrameMkLst>
-        </pc:graphicFrameChg>
-        <pc:graphicFrameChg chg="add mod modGraphic">
-          <ac:chgData name="성우 최" userId="b39b9c6800b01a47" providerId="LiveId" clId="{86918D44-C542-442D-8291-F46EC03904AF}" dt="2026-03-29T19:15:12.608" v="748" actId="3064"/>
-          <ac:graphicFrameMkLst>
-            <pc:docMk/>
-            <pc:sldMk cId="3187522303" sldId="629"/>
-            <ac:graphicFrameMk id="27" creationId="{C86B361C-AF8D-9C06-48AB-321DEEFC08A1}"/>
-          </ac:graphicFrameMkLst>
-        </pc:graphicFrameChg>
-        <pc:graphicFrameChg chg="add">
-          <ac:chgData name="성우 최" userId="b39b9c6800b01a47" providerId="LiveId" clId="{86918D44-C542-442D-8291-F46EC03904AF}" dt="2026-03-29T19:20:34.248" v="838"/>
-          <ac:graphicFrameMkLst>
-            <pc:docMk/>
-            <pc:sldMk cId="3187522303" sldId="629"/>
-            <ac:graphicFrameMk id="45" creationId="{6F313320-405C-1C56-1E42-D6544D7A4A81}"/>
-          </ac:graphicFrameMkLst>
-        </pc:graphicFrameChg>
-        <pc:graphicFrameChg chg="add mod modGraphic">
-          <ac:chgData name="성우 최" userId="b39b9c6800b01a47" providerId="LiveId" clId="{86918D44-C542-442D-8291-F46EC03904AF}" dt="2026-03-29T19:23:13.228" v="884" actId="1076"/>
-          <ac:graphicFrameMkLst>
-            <pc:docMk/>
-            <pc:sldMk cId="3187522303" sldId="629"/>
-            <ac:graphicFrameMk id="46" creationId="{39844BC7-9E0B-5E1D-6A16-9B1B977CFCD0}"/>
-          </ac:graphicFrameMkLst>
-        </pc:graphicFrameChg>
-        <pc:graphicFrameChg chg="add mod">
-          <ac:chgData name="성우 최" userId="b39b9c6800b01a47" providerId="LiveId" clId="{86918D44-C542-442D-8291-F46EC03904AF}" dt="2026-03-29T19:23:19.160" v="885" actId="1076"/>
-          <ac:graphicFrameMkLst>
-            <pc:docMk/>
-            <pc:sldMk cId="3187522303" sldId="629"/>
-            <ac:graphicFrameMk id="47" creationId="{F83D0A7E-07B5-BE79-26A0-7CCB1A052686}"/>
-          </ac:graphicFrameMkLst>
-        </pc:graphicFrameChg>
-        <pc:cxnChg chg="add del">
-          <ac:chgData name="성우 최" userId="b39b9c6800b01a47" providerId="LiveId" clId="{86918D44-C542-442D-8291-F46EC03904AF}" dt="2026-03-29T19:23:35.207" v="887" actId="478"/>
-          <ac:cxnSpMkLst>
-            <pc:docMk/>
-            <pc:sldMk cId="3187522303" sldId="629"/>
-            <ac:cxnSpMk id="49" creationId="{D61FC696-666F-B2A5-E302-5542EE2D523F}"/>
-          </ac:cxnSpMkLst>
-        </pc:cxnChg>
-        <pc:cxnChg chg="add del">
-          <ac:chgData name="성우 최" userId="b39b9c6800b01a47" providerId="LiveId" clId="{86918D44-C542-442D-8291-F46EC03904AF}" dt="2026-03-29T19:24:30.036" v="927" actId="478"/>
-          <ac:cxnSpMkLst>
-            <pc:docMk/>
-            <pc:sldMk cId="3187522303" sldId="629"/>
-            <ac:cxnSpMk id="53" creationId="{6D90EB1E-D4BF-B43E-6229-253A9445F29A}"/>
-          </ac:cxnSpMkLst>
-        </pc:cxnChg>
-        <pc:cxnChg chg="add mod">
-          <ac:chgData name="성우 최" userId="b39b9c6800b01a47" providerId="LiveId" clId="{86918D44-C542-442D-8291-F46EC03904AF}" dt="2026-03-29T19:25:05.248" v="931" actId="1076"/>
-          <ac:cxnSpMkLst>
-            <pc:docMk/>
-            <pc:sldMk cId="3187522303" sldId="629"/>
-            <ac:cxnSpMk id="55" creationId="{352CB909-210D-AD6F-DD3D-17F7FC0D5134}"/>
-          </ac:cxnSpMkLst>
-        </pc:cxnChg>
-        <pc:cxnChg chg="add del mod">
-          <ac:chgData name="성우 최" userId="b39b9c6800b01a47" providerId="LiveId" clId="{86918D44-C542-442D-8291-F46EC03904AF}" dt="2026-03-29T19:25:07.889" v="932" actId="478"/>
-          <ac:cxnSpMkLst>
-            <pc:docMk/>
-            <pc:sldMk cId="3187522303" sldId="629"/>
-            <ac:cxnSpMk id="57" creationId="{DDD138B8-A56A-7622-F16A-EEE44607C8E7}"/>
-          </ac:cxnSpMkLst>
-        </pc:cxnChg>
-        <pc:cxnChg chg="mod">
-          <ac:chgData name="성우 최" userId="b39b9c6800b01a47" providerId="LiveId" clId="{86918D44-C542-442D-8291-F46EC03904AF}" dt="2026-03-30T05:06:42.691" v="988" actId="14100"/>
-          <ac:cxnSpMkLst>
-            <pc:docMk/>
-            <pc:sldMk cId="3187522303" sldId="629"/>
-            <ac:cxnSpMk id="58" creationId="{F73E54D0-DD04-A7C0-B09A-A636D4CE66C0}"/>
-          </ac:cxnSpMkLst>
-        </pc:cxnChg>
-        <pc:cxnChg chg="add">
-          <ac:chgData name="성우 최" userId="b39b9c6800b01a47" providerId="LiveId" clId="{86918D44-C542-442D-8291-F46EC03904AF}" dt="2026-03-29T19:25:20.882" v="934" actId="11529"/>
-          <ac:cxnSpMkLst>
-            <pc:docMk/>
-            <pc:sldMk cId="3187522303" sldId="629"/>
-            <ac:cxnSpMk id="59" creationId="{88A7EEDB-C072-F52D-0504-73509F6129ED}"/>
-          </ac:cxnSpMkLst>
-        </pc:cxnChg>
-      </pc:sldChg>
-      <pc:sldChg chg="del">
-        <pc:chgData name="성우 최" userId="b39b9c6800b01a47" providerId="LiveId" clId="{86918D44-C542-442D-8291-F46EC03904AF}" dt="2026-03-29T19:26:24.130" v="987" actId="47"/>
-        <pc:sldMkLst>
-          <pc:docMk/>
-          <pc:sldMk cId="222105614" sldId="630"/>
-        </pc:sldMkLst>
-      </pc:sldChg>
-      <pc:sldChg chg="modSp add del mod">
-        <pc:chgData name="성우 최" userId="b39b9c6800b01a47" providerId="LiveId" clId="{86918D44-C542-442D-8291-F46EC03904AF}" dt="2026-03-29T19:11:53.593" v="704" actId="47"/>
-        <pc:sldMkLst>
-          <pc:docMk/>
-          <pc:sldMk cId="2542587376" sldId="631"/>
-        </pc:sldMkLst>
-        <pc:spChg chg="mod">
-          <ac:chgData name="성우 최" userId="b39b9c6800b01a47" providerId="LiveId" clId="{86918D44-C542-442D-8291-F46EC03904AF}" dt="2026-03-29T19:08:52.714" v="672" actId="20577"/>
-          <ac:spMkLst>
-            <pc:docMk/>
-            <pc:sldMk cId="2542587376" sldId="631"/>
-            <ac:spMk id="2" creationId="{CAC21F43-1DC9-E469-5631-DDA842F33941}"/>
-          </ac:spMkLst>
-        </pc:spChg>
-      </pc:sldChg>
-      <pc:sldChg chg="modSp add del mod">
-        <pc:chgData name="성우 최" userId="b39b9c6800b01a47" providerId="LiveId" clId="{86918D44-C542-442D-8291-F46EC03904AF}" dt="2026-03-29T19:15:16.796" v="750" actId="47"/>
-        <pc:sldMkLst>
-          <pc:docMk/>
-          <pc:sldMk cId="718405309" sldId="632"/>
-        </pc:sldMkLst>
-        <pc:spChg chg="mod">
-          <ac:chgData name="성우 최" userId="b39b9c6800b01a47" providerId="LiveId" clId="{86918D44-C542-442D-8291-F46EC03904AF}" dt="2026-03-29T19:11:59.927" v="713" actId="20577"/>
-          <ac:spMkLst>
-            <pc:docMk/>
-            <pc:sldMk cId="718405309" sldId="632"/>
-            <ac:spMk id="2" creationId="{E0DCBF30-60DE-C91B-5661-FB428BB7B450}"/>
-          </ac:spMkLst>
-        </pc:spChg>
-      </pc:sldChg>
-      <pc:sldChg chg="modSp add del mod">
-        <pc:chgData name="성우 최" userId="b39b9c6800b01a47" providerId="LiveId" clId="{86918D44-C542-442D-8291-F46EC03904AF}" dt="2026-03-29T19:25:31.374" v="936" actId="47"/>
-        <pc:sldMkLst>
-          <pc:docMk/>
-          <pc:sldMk cId="4244012357" sldId="633"/>
-        </pc:sldMkLst>
-        <pc:spChg chg="mod">
-          <ac:chgData name="성우 최" userId="b39b9c6800b01a47" providerId="LiveId" clId="{86918D44-C542-442D-8291-F46EC03904AF}" dt="2026-03-29T19:15:21.516" v="759" actId="20577"/>
-          <ac:spMkLst>
-            <pc:docMk/>
-            <pc:sldMk cId="4244012357" sldId="633"/>
-            <ac:spMk id="2" creationId="{FBD45E22-96F6-77D5-7CD7-D6B94426D200}"/>
-          </ac:spMkLst>
-        </pc:spChg>
-        <pc:graphicFrameChg chg="mod">
-          <ac:chgData name="성우 최" userId="b39b9c6800b01a47" providerId="LiveId" clId="{86918D44-C542-442D-8291-F46EC03904AF}" dt="2026-03-29T19:15:54.154" v="761"/>
-          <ac:graphicFrameMkLst>
-            <pc:docMk/>
-            <pc:sldMk cId="4244012357" sldId="633"/>
-            <ac:graphicFrameMk id="9" creationId="{2DCF5B8B-2790-F3E7-7DA8-A1292D3F8FFC}"/>
-          </ac:graphicFrameMkLst>
-        </pc:graphicFrameChg>
-      </pc:sldChg>
-      <pc:sldChg chg="modSp add mod">
-        <pc:chgData name="성우 최" userId="b39b9c6800b01a47" providerId="LiveId" clId="{86918D44-C542-442D-8291-F46EC03904AF}" dt="2026-03-29T19:26:14.239" v="986" actId="20577"/>
-        <pc:sldMkLst>
-          <pc:docMk/>
-          <pc:sldMk cId="1268332840" sldId="634"/>
-        </pc:sldMkLst>
-        <pc:spChg chg="mod">
-          <ac:chgData name="성우 최" userId="b39b9c6800b01a47" providerId="LiveId" clId="{86918D44-C542-442D-8291-F46EC03904AF}" dt="2026-03-29T19:25:35.363" v="940" actId="20577"/>
-          <ac:spMkLst>
-            <pc:docMk/>
-            <pc:sldMk cId="1268332840" sldId="634"/>
-            <ac:spMk id="2" creationId="{6C182C76-7872-D209-3E4A-B37949EFC8E2}"/>
-          </ac:spMkLst>
-        </pc:spChg>
-        <pc:spChg chg="mod">
-          <ac:chgData name="성우 최" userId="b39b9c6800b01a47" providerId="LiveId" clId="{86918D44-C542-442D-8291-F46EC03904AF}" dt="2026-03-29T19:26:14.239" v="986" actId="20577"/>
-          <ac:spMkLst>
-            <pc:docMk/>
-            <pc:sldMk cId="1268332840" sldId="634"/>
-            <ac:spMk id="51" creationId="{3453A248-91ED-370E-2FCF-C5C2C98787F9}"/>
-          </ac:spMkLst>
-        </pc:spChg>
-        <pc:cxnChg chg="mod">
-          <ac:chgData name="성우 최" userId="b39b9c6800b01a47" providerId="LiveId" clId="{86918D44-C542-442D-8291-F46EC03904AF}" dt="2026-03-29T19:26:11.746" v="982" actId="20577"/>
-          <ac:cxnSpMkLst>
-            <pc:docMk/>
-            <pc:sldMk cId="1268332840" sldId="634"/>
-            <ac:cxnSpMk id="59" creationId="{2DAFA4E0-FE4B-A16C-09D0-B990779909E5}"/>
-          </ac:cxnSpMkLst>
-        </pc:cxnChg>
-      </pc:sldChg>
-      <pc:sldChg chg="modSp mod">
-        <pc:chgData name="성우 최" userId="b39b9c6800b01a47" providerId="LiveId" clId="{86918D44-C542-442D-8291-F46EC03904AF}" dt="2026-03-30T05:06:54.366" v="989" actId="14100"/>
-        <pc:sldMkLst>
-          <pc:docMk/>
-          <pc:sldMk cId="3645632133" sldId="636"/>
-        </pc:sldMkLst>
-        <pc:cxnChg chg="mod">
-          <ac:chgData name="성우 최" userId="b39b9c6800b01a47" providerId="LiveId" clId="{86918D44-C542-442D-8291-F46EC03904AF}" dt="2026-03-30T05:06:54.366" v="989" actId="14100"/>
-          <ac:cxnSpMkLst>
-            <pc:docMk/>
-            <pc:sldMk cId="3645632133" sldId="636"/>
-            <ac:cxnSpMk id="58" creationId="{FE7B9399-1A65-BC50-AD0D-FD94835DBD5E}"/>
-          </ac:cxnSpMkLst>
-        </pc:cxnChg>
       </pc:sldChg>
     </pc:docChg>
   </pc:docChgLst>
@@ -2327,6 +1615,127 @@
         <p:cNvPr id="1" name="">
           <a:extLst>
             <a:ext uri="{FF2B5EF4-FFF2-40B4-BE49-F238E27FC236}">
+              <a16:creationId xmlns:a16="http://schemas.microsoft.com/office/drawing/2014/main" id="{98C7338D-3299-39E6-9DDD-0F8F5CAA4597}"/>
+            </a:ext>
+          </a:extLst>
+        </p:cNvPr>
+        <p:cNvGrpSpPr/>
+        <p:nvPr/>
+      </p:nvGrpSpPr>
+      <p:grpSpPr>
+        <a:xfrm>
+          <a:off x="0" y="0"/>
+          <a:ext cx="0" cy="0"/>
+          <a:chOff x="0" y="0"/>
+          <a:chExt cx="0" cy="0"/>
+        </a:xfrm>
+      </p:grpSpPr>
+      <p:sp>
+        <p:nvSpPr>
+          <p:cNvPr id="2" name="슬라이드 이미지 개체 틀 1">
+            <a:extLst>
+              <a:ext uri="{FF2B5EF4-FFF2-40B4-BE49-F238E27FC236}">
+                <a16:creationId xmlns:a16="http://schemas.microsoft.com/office/drawing/2014/main" id="{83CCE7E3-1CDD-E2A0-D0E7-409D3F037D0C}"/>
+              </a:ext>
+            </a:extLst>
+          </p:cNvPr>
+          <p:cNvSpPr>
+            <a:spLocks noGrp="1" noRot="1" noChangeAspect="1"/>
+          </p:cNvSpPr>
+          <p:nvPr>
+            <p:ph type="sldImg"/>
+          </p:nvPr>
+        </p:nvSpPr>
+        <p:spPr/>
+      </p:sp>
+      <p:sp>
+        <p:nvSpPr>
+          <p:cNvPr id="3" name="슬라이드 노트 개체 틀 2">
+            <a:extLst>
+              <a:ext uri="{FF2B5EF4-FFF2-40B4-BE49-F238E27FC236}">
+                <a16:creationId xmlns:a16="http://schemas.microsoft.com/office/drawing/2014/main" id="{5304776C-4756-512F-D150-2D83CF21FC4F}"/>
+              </a:ext>
+            </a:extLst>
+          </p:cNvPr>
+          <p:cNvSpPr>
+            <a:spLocks noGrp="1"/>
+          </p:cNvSpPr>
+          <p:nvPr>
+            <p:ph type="body" idx="1"/>
+          </p:nvPr>
+        </p:nvSpPr>
+        <p:spPr/>
+        <p:txBody>
+          <a:bodyPr/>
+          <a:lstStyle/>
+          <a:p>
+            <a:pPr algn="just" latinLnBrk="1">
+              <a:lnSpc>
+                <a:spcPct val="107000"/>
+              </a:lnSpc>
+              <a:spcAft>
+                <a:spcPts val="800"/>
+              </a:spcAft>
+            </a:pPr>
+            <a:endParaRPr lang="en-US" altLang="ko-KR" sz="1600" b="1" kern="100" dirty="0">
+              <a:effectLst/>
+              <a:latin typeface="맑은 고딕" panose="020B0503020000020004" pitchFamily="50" charset="-127"/>
+              <a:ea typeface="맑은 고딕" panose="020B0503020000020004" pitchFamily="50" charset="-127"/>
+              <a:cs typeface="Times New Roman" panose="02020603050405020304" pitchFamily="18" charset="0"/>
+            </a:endParaRPr>
+          </a:p>
+        </p:txBody>
+      </p:sp>
+      <p:sp>
+        <p:nvSpPr>
+          <p:cNvPr id="4" name="슬라이드 번호 개체 틀 3">
+            <a:extLst>
+              <a:ext uri="{FF2B5EF4-FFF2-40B4-BE49-F238E27FC236}">
+                <a16:creationId xmlns:a16="http://schemas.microsoft.com/office/drawing/2014/main" id="{C5C51FC7-52F1-D61B-DB8B-9BC6E4943FFB}"/>
+              </a:ext>
+            </a:extLst>
+          </p:cNvPr>
+          <p:cNvSpPr>
+            <a:spLocks noGrp="1"/>
+          </p:cNvSpPr>
+          <p:nvPr>
+            <p:ph type="sldNum" sz="quarter" idx="5"/>
+          </p:nvPr>
+        </p:nvSpPr>
+        <p:spPr/>
+        <p:txBody>
+          <a:bodyPr/>
+          <a:lstStyle/>
+          <a:p>
+            <a:fld id="{D0C664DC-C26E-465D-99FF-B6F4031E277D}" type="slidenum">
+              <a:rPr lang="ko-KR" altLang="en-US" smtClean="0"/>
+              <a:t>3</a:t>
+            </a:fld>
+            <a:endParaRPr lang="ko-KR" altLang="en-US"/>
+          </a:p>
+        </p:txBody>
+      </p:sp>
+    </p:spTree>
+    <p:extLst>
+      <p:ext uri="{BB962C8B-B14F-4D97-AF65-F5344CB8AC3E}">
+        <p14:creationId xmlns:p14="http://schemas.microsoft.com/office/powerpoint/2010/main" val="606751372"/>
+      </p:ext>
+    </p:extLst>
+  </p:cSld>
+  <p:clrMapOvr>
+    <a:masterClrMapping/>
+  </p:clrMapOvr>
+</p:notes>
+</file>
+
+<file path=ppt/notesSlides/notesSlide3.xml><?xml version="1.0" encoding="utf-8"?>
+<p:notes xmlns:a="http://schemas.openxmlformats.org/drawingml/2006/main" xmlns:r="http://schemas.openxmlformats.org/officeDocument/2006/relationships" xmlns:p="http://schemas.openxmlformats.org/presentationml/2006/main">
+  <p:cSld>
+    <p:spTree>
+      <p:nvGrpSpPr>
+        <p:cNvPr id="1" name="">
+          <a:extLst>
+            <a:ext uri="{FF2B5EF4-FFF2-40B4-BE49-F238E27FC236}">
               <a16:creationId xmlns:a16="http://schemas.microsoft.com/office/drawing/2014/main" id="{BECB806B-F6ED-4971-388A-082ABA72F5F8}"/>
             </a:ext>
           </a:extLst>
@@ -2421,7 +1830,7 @@
           <a:p>
             <a:fld id="{D0C664DC-C26E-465D-99FF-B6F4031E277D}" type="slidenum">
               <a:rPr lang="ko-KR" altLang="en-US" smtClean="0"/>
-              <a:t>3</a:t>
+              <a:t>4</a:t>
             </a:fld>
             <a:endParaRPr lang="ko-KR" altLang="en-US"/>
           </a:p>
@@ -2440,7 +1849,7 @@
 </p:notes>
 </file>
 
-<file path=ppt/notesSlides/notesSlide3.xml><?xml version="1.0" encoding="utf-8"?>
+<file path=ppt/notesSlides/notesSlide4.xml><?xml version="1.0" encoding="utf-8"?>
 <p:notes xmlns:a="http://schemas.openxmlformats.org/drawingml/2006/main" xmlns:r="http://schemas.openxmlformats.org/officeDocument/2006/relationships" xmlns:p="http://schemas.openxmlformats.org/presentationml/2006/main">
   <p:cSld>
     <p:spTree>
@@ -2542,7 +1951,7 @@
           <a:p>
             <a:fld id="{D0C664DC-C26E-465D-99FF-B6F4031E277D}" type="slidenum">
               <a:rPr lang="ko-KR" altLang="en-US" smtClean="0"/>
-              <a:t>4</a:t>
+              <a:t>5</a:t>
             </a:fld>
             <a:endParaRPr lang="ko-KR" altLang="en-US"/>
           </a:p>
@@ -11241,6 +10650,477 @@
                   <a:srgbClr val="2F5597"/>
                 </a:solidFill>
               </a:rPr>
+              <a:t>Overview</a:t>
+            </a:r>
+            <a:endParaRPr lang="ko-KR" altLang="en-US" dirty="0">
+              <a:solidFill>
+                <a:srgbClr val="2F5597"/>
+              </a:solidFill>
+            </a:endParaRPr>
+          </a:p>
+        </p:txBody>
+      </p:sp>
+      <p:sp>
+        <p:nvSpPr>
+          <p:cNvPr id="6" name="내용 개체 틀 2">
+            <a:extLst>
+              <a:ext uri="{FF2B5EF4-FFF2-40B4-BE49-F238E27FC236}">
+                <a16:creationId xmlns:a16="http://schemas.microsoft.com/office/drawing/2014/main" id="{EBE37C29-BE2D-02B2-CB82-F09AB08495B9}"/>
+              </a:ext>
+            </a:extLst>
+          </p:cNvPr>
+          <p:cNvSpPr txBox="1">
+            <a:spLocks/>
+          </p:cNvSpPr>
+          <p:nvPr/>
+        </p:nvSpPr>
+        <p:spPr>
+          <a:xfrm>
+            <a:off x="318702" y="907258"/>
+            <a:ext cx="11554596" cy="2846595"/>
+          </a:xfrm>
+          <a:prstGeom prst="rect">
+            <a:avLst/>
+          </a:prstGeom>
+          <a:noFill/>
+          <a:ln>
+            <a:noFill/>
+          </a:ln>
+        </p:spPr>
+        <p:txBody>
+          <a:bodyPr spcFirstLastPara="1" wrap="square" lIns="91425" tIns="45700" rIns="91425" bIns="45700" anchor="t" anchorCtr="0">
+            <a:normAutofit/>
+          </a:bodyPr>
+          <a:lstStyle>
+            <a:defPPr marR="0" lvl="0" algn="l" rtl="0">
+              <a:lnSpc>
+                <a:spcPct val="100000"/>
+              </a:lnSpc>
+              <a:spcBef>
+                <a:spcPts val="0"/>
+              </a:spcBef>
+              <a:spcAft>
+                <a:spcPts val="0"/>
+              </a:spcAft>
+            </a:defPPr>
+            <a:lvl1pPr marL="457200" marR="0" lvl="0" indent="-355600" algn="l" rtl="0">
+              <a:lnSpc>
+                <a:spcPct val="90000"/>
+              </a:lnSpc>
+              <a:spcBef>
+                <a:spcPts val="1000"/>
+              </a:spcBef>
+              <a:spcAft>
+                <a:spcPts val="0"/>
+              </a:spcAft>
+              <a:buClr>
+                <a:schemeClr val="dk1"/>
+              </a:buClr>
+              <a:buSzPts val="2000"/>
+              <a:buFont typeface="Noto Sans Symbols"/>
+              <a:buChar char="▪"/>
+              <a:defRPr sz="2000" b="1" i="0" u="none" strike="noStrike" cap="none">
+                <a:solidFill>
+                  <a:schemeClr val="dk1"/>
+                </a:solidFill>
+                <a:latin typeface="Calibri"/>
+                <a:ea typeface="Calibri"/>
+                <a:cs typeface="Calibri"/>
+                <a:sym typeface="Calibri"/>
+              </a:defRPr>
+            </a:lvl1pPr>
+            <a:lvl2pPr marL="914400" marR="0" lvl="1" indent="-342900" algn="l" rtl="0">
+              <a:lnSpc>
+                <a:spcPct val="90000"/>
+              </a:lnSpc>
+              <a:spcBef>
+                <a:spcPts val="500"/>
+              </a:spcBef>
+              <a:spcAft>
+                <a:spcPts val="0"/>
+              </a:spcAft>
+              <a:buClr>
+                <a:schemeClr val="dk1"/>
+              </a:buClr>
+              <a:buSzPts val="1800"/>
+              <a:buFont typeface="Arial"/>
+              <a:buChar char="•"/>
+              <a:defRPr sz="1800" b="0" i="0" u="none" strike="noStrike" cap="none">
+                <a:solidFill>
+                  <a:schemeClr val="dk1"/>
+                </a:solidFill>
+                <a:latin typeface="Calibri"/>
+                <a:ea typeface="Calibri"/>
+                <a:cs typeface="Calibri"/>
+                <a:sym typeface="Calibri"/>
+              </a:defRPr>
+            </a:lvl2pPr>
+            <a:lvl3pPr marL="1371600" marR="0" lvl="2" indent="-330200" algn="l" rtl="0">
+              <a:lnSpc>
+                <a:spcPct val="90000"/>
+              </a:lnSpc>
+              <a:spcBef>
+                <a:spcPts val="500"/>
+              </a:spcBef>
+              <a:spcAft>
+                <a:spcPts val="0"/>
+              </a:spcAft>
+              <a:buClr>
+                <a:schemeClr val="dk1"/>
+              </a:buClr>
+              <a:buSzPts val="1600"/>
+              <a:buFont typeface="Noto Sans Symbols"/>
+              <a:buChar char="✔"/>
+              <a:defRPr sz="1600" b="0" i="0" u="none" strike="noStrike" cap="none">
+                <a:solidFill>
+                  <a:schemeClr val="dk1"/>
+                </a:solidFill>
+                <a:latin typeface="Calibri"/>
+                <a:ea typeface="Calibri"/>
+                <a:cs typeface="Calibri"/>
+                <a:sym typeface="Calibri"/>
+              </a:defRPr>
+            </a:lvl3pPr>
+            <a:lvl4pPr marL="1828800" marR="0" lvl="3" indent="-317500" algn="l" rtl="0">
+              <a:lnSpc>
+                <a:spcPct val="90000"/>
+              </a:lnSpc>
+              <a:spcBef>
+                <a:spcPts val="500"/>
+              </a:spcBef>
+              <a:spcAft>
+                <a:spcPts val="0"/>
+              </a:spcAft>
+              <a:buClr>
+                <a:schemeClr val="dk1"/>
+              </a:buClr>
+              <a:buSzPts val="1400"/>
+              <a:buFont typeface="Arial"/>
+              <a:buChar char="•"/>
+              <a:defRPr sz="1400" b="0" i="0" u="none" strike="noStrike" cap="none">
+                <a:solidFill>
+                  <a:schemeClr val="dk1"/>
+                </a:solidFill>
+                <a:latin typeface="Calibri"/>
+                <a:ea typeface="Calibri"/>
+                <a:cs typeface="Calibri"/>
+                <a:sym typeface="Calibri"/>
+              </a:defRPr>
+            </a:lvl4pPr>
+            <a:lvl5pPr marL="2286000" marR="0" lvl="4" indent="-342900" algn="l" rtl="0">
+              <a:lnSpc>
+                <a:spcPct val="90000"/>
+              </a:lnSpc>
+              <a:spcBef>
+                <a:spcPts val="500"/>
+              </a:spcBef>
+              <a:spcAft>
+                <a:spcPts val="0"/>
+              </a:spcAft>
+              <a:buClr>
+                <a:schemeClr val="dk1"/>
+              </a:buClr>
+              <a:buSzPts val="1800"/>
+              <a:buFont typeface="Arial"/>
+              <a:buChar char="•"/>
+              <a:defRPr sz="1800" b="0" i="0" u="none" strike="noStrike" cap="none">
+                <a:solidFill>
+                  <a:schemeClr val="dk1"/>
+                </a:solidFill>
+                <a:latin typeface="Calibri"/>
+                <a:ea typeface="Calibri"/>
+                <a:cs typeface="Calibri"/>
+                <a:sym typeface="Calibri"/>
+              </a:defRPr>
+            </a:lvl5pPr>
+            <a:lvl6pPr marL="2743200" marR="0" lvl="5" indent="-342900" algn="l" rtl="0">
+              <a:lnSpc>
+                <a:spcPct val="90000"/>
+              </a:lnSpc>
+              <a:spcBef>
+                <a:spcPts val="500"/>
+              </a:spcBef>
+              <a:spcAft>
+                <a:spcPts val="0"/>
+              </a:spcAft>
+              <a:buClr>
+                <a:schemeClr val="dk1"/>
+              </a:buClr>
+              <a:buSzPts val="1800"/>
+              <a:buFont typeface="Arial"/>
+              <a:buChar char="•"/>
+              <a:defRPr sz="1800" b="0" i="0" u="none" strike="noStrike" cap="none">
+                <a:solidFill>
+                  <a:schemeClr val="dk1"/>
+                </a:solidFill>
+                <a:latin typeface="Malgun Gothic"/>
+                <a:ea typeface="Malgun Gothic"/>
+                <a:cs typeface="Malgun Gothic"/>
+                <a:sym typeface="Malgun Gothic"/>
+              </a:defRPr>
+            </a:lvl6pPr>
+            <a:lvl7pPr marL="3200400" marR="0" lvl="6" indent="-342900" algn="l" rtl="0">
+              <a:lnSpc>
+                <a:spcPct val="90000"/>
+              </a:lnSpc>
+              <a:spcBef>
+                <a:spcPts val="500"/>
+              </a:spcBef>
+              <a:spcAft>
+                <a:spcPts val="0"/>
+              </a:spcAft>
+              <a:buClr>
+                <a:schemeClr val="dk1"/>
+              </a:buClr>
+              <a:buSzPts val="1800"/>
+              <a:buFont typeface="Arial"/>
+              <a:buChar char="•"/>
+              <a:defRPr sz="1800" b="0" i="0" u="none" strike="noStrike" cap="none">
+                <a:solidFill>
+                  <a:schemeClr val="dk1"/>
+                </a:solidFill>
+                <a:latin typeface="Malgun Gothic"/>
+                <a:ea typeface="Malgun Gothic"/>
+                <a:cs typeface="Malgun Gothic"/>
+                <a:sym typeface="Malgun Gothic"/>
+              </a:defRPr>
+            </a:lvl7pPr>
+            <a:lvl8pPr marL="3657600" marR="0" lvl="7" indent="-342900" algn="l" rtl="0">
+              <a:lnSpc>
+                <a:spcPct val="90000"/>
+              </a:lnSpc>
+              <a:spcBef>
+                <a:spcPts val="500"/>
+              </a:spcBef>
+              <a:spcAft>
+                <a:spcPts val="0"/>
+              </a:spcAft>
+              <a:buClr>
+                <a:schemeClr val="dk1"/>
+              </a:buClr>
+              <a:buSzPts val="1800"/>
+              <a:buFont typeface="Arial"/>
+              <a:buChar char="•"/>
+              <a:defRPr sz="1800" b="0" i="0" u="none" strike="noStrike" cap="none">
+                <a:solidFill>
+                  <a:schemeClr val="dk1"/>
+                </a:solidFill>
+                <a:latin typeface="Malgun Gothic"/>
+                <a:ea typeface="Malgun Gothic"/>
+                <a:cs typeface="Malgun Gothic"/>
+                <a:sym typeface="Malgun Gothic"/>
+              </a:defRPr>
+            </a:lvl8pPr>
+            <a:lvl9pPr marL="4114800" marR="0" lvl="8" indent="-342900" algn="l" rtl="0">
+              <a:lnSpc>
+                <a:spcPct val="90000"/>
+              </a:lnSpc>
+              <a:spcBef>
+                <a:spcPts val="500"/>
+              </a:spcBef>
+              <a:spcAft>
+                <a:spcPts val="0"/>
+              </a:spcAft>
+              <a:buClr>
+                <a:schemeClr val="dk1"/>
+              </a:buClr>
+              <a:buSzPts val="1800"/>
+              <a:buFont typeface="Arial"/>
+              <a:buChar char="•"/>
+              <a:defRPr sz="1800" b="0" i="0" u="none" strike="noStrike" cap="none">
+                <a:solidFill>
+                  <a:schemeClr val="dk1"/>
+                </a:solidFill>
+                <a:latin typeface="Malgun Gothic"/>
+                <a:ea typeface="Malgun Gothic"/>
+                <a:cs typeface="Malgun Gothic"/>
+                <a:sym typeface="Malgun Gothic"/>
+              </a:defRPr>
+            </a:lvl9pPr>
+          </a:lstStyle>
+          <a:p>
+            <a:pPr>
+              <a:lnSpc>
+                <a:spcPct val="150000"/>
+              </a:lnSpc>
+              <a:defRPr/>
+            </a:pPr>
+            <a:r>
+              <a:rPr lang="en-US" altLang="ko-KR" sz="1800" dirty="0">
+                <a:solidFill>
+                  <a:schemeClr val="tx1"/>
+                </a:solidFill>
+                <a:latin typeface="Calibri" panose="020F0502020204030204" pitchFamily="34" charset="0"/>
+                <a:cs typeface="Calibri" panose="020F0502020204030204" pitchFamily="34" charset="0"/>
+              </a:rPr>
+              <a:t>RA </a:t>
+            </a:r>
+            <a:r>
+              <a:rPr lang="ko-KR" altLang="en-US" sz="1800" dirty="0">
+                <a:solidFill>
+                  <a:schemeClr val="tx1"/>
+                </a:solidFill>
+                <a:latin typeface="Calibri" panose="020F0502020204030204" pitchFamily="34" charset="0"/>
+                <a:cs typeface="Calibri" panose="020F0502020204030204" pitchFamily="34" charset="0"/>
+              </a:rPr>
+              <a:t>알고리즘</a:t>
+            </a:r>
+            <a:r>
+              <a:rPr lang="en-US" altLang="ko-KR" sz="1800" dirty="0">
+                <a:solidFill>
+                  <a:schemeClr val="tx1"/>
+                </a:solidFill>
+                <a:latin typeface="Calibri" panose="020F0502020204030204" pitchFamily="34" charset="0"/>
+                <a:cs typeface="Calibri" panose="020F0502020204030204" pitchFamily="34" charset="0"/>
+              </a:rPr>
+              <a:t> </a:t>
+            </a:r>
+            <a:r>
+              <a:rPr lang="ko-KR" altLang="en-US" sz="1800" dirty="0">
+                <a:solidFill>
+                  <a:schemeClr val="tx1"/>
+                </a:solidFill>
+                <a:latin typeface="Calibri" panose="020F0502020204030204" pitchFamily="34" charset="0"/>
+                <a:cs typeface="Calibri" panose="020F0502020204030204" pitchFamily="34" charset="0"/>
+              </a:rPr>
+              <a:t>도식화하기</a:t>
+            </a:r>
+            <a:endParaRPr lang="en-US" altLang="ko-KR" sz="1800" dirty="0">
+              <a:solidFill>
+                <a:schemeClr val="tx1"/>
+              </a:solidFill>
+              <a:latin typeface="Calibri" panose="020F0502020204030204" pitchFamily="34" charset="0"/>
+              <a:cs typeface="Calibri" panose="020F0502020204030204" pitchFamily="34" charset="0"/>
+            </a:endParaRPr>
+          </a:p>
+          <a:p>
+            <a:pPr>
+              <a:lnSpc>
+                <a:spcPct val="150000"/>
+              </a:lnSpc>
+              <a:defRPr/>
+            </a:pPr>
+            <a:r>
+              <a:rPr lang="en-US" altLang="ko-KR" sz="1800">
+                <a:solidFill>
+                  <a:schemeClr val="tx1"/>
+                </a:solidFill>
+                <a:latin typeface="Calibri" panose="020F0502020204030204" pitchFamily="34" charset="0"/>
+                <a:cs typeface="Calibri" panose="020F0502020204030204" pitchFamily="34" charset="0"/>
+              </a:rPr>
+              <a:t>ZS </a:t>
+            </a:r>
+            <a:r>
+              <a:rPr lang="ko-KR" altLang="en-US" sz="1800" dirty="0">
+                <a:solidFill>
+                  <a:schemeClr val="tx1"/>
+                </a:solidFill>
+                <a:latin typeface="Calibri" panose="020F0502020204030204" pitchFamily="34" charset="0"/>
+                <a:cs typeface="Calibri" panose="020F0502020204030204" pitchFamily="34" charset="0"/>
+              </a:rPr>
+              <a:t>알고리즘</a:t>
+            </a:r>
+            <a:r>
+              <a:rPr lang="en-US" altLang="ko-KR" sz="1800" dirty="0">
+                <a:solidFill>
+                  <a:schemeClr val="tx1"/>
+                </a:solidFill>
+                <a:latin typeface="Calibri" panose="020F0502020204030204" pitchFamily="34" charset="0"/>
+                <a:cs typeface="Calibri" panose="020F0502020204030204" pitchFamily="34" charset="0"/>
+              </a:rPr>
+              <a:t> </a:t>
+            </a:r>
+            <a:r>
+              <a:rPr lang="ko-KR" altLang="en-US" sz="1800" dirty="0">
+                <a:solidFill>
+                  <a:schemeClr val="tx1"/>
+                </a:solidFill>
+                <a:latin typeface="Calibri" panose="020F0502020204030204" pitchFamily="34" charset="0"/>
+                <a:cs typeface="Calibri" panose="020F0502020204030204" pitchFamily="34" charset="0"/>
+              </a:rPr>
+              <a:t>도식화하기</a:t>
+            </a:r>
+            <a:endParaRPr lang="en-US" altLang="ko-KR" sz="1800" dirty="0">
+              <a:solidFill>
+                <a:schemeClr val="tx1"/>
+              </a:solidFill>
+              <a:latin typeface="Calibri" panose="020F0502020204030204" pitchFamily="34" charset="0"/>
+              <a:cs typeface="Calibri" panose="020F0502020204030204" pitchFamily="34" charset="0"/>
+            </a:endParaRPr>
+          </a:p>
+        </p:txBody>
+      </p:sp>
+    </p:spTree>
+    <p:extLst>
+      <p:ext uri="{BB962C8B-B14F-4D97-AF65-F5344CB8AC3E}">
+        <p14:creationId xmlns:p14="http://schemas.microsoft.com/office/powerpoint/2010/main" val="846647448"/>
+      </p:ext>
+    </p:extLst>
+  </p:cSld>
+  <p:clrMapOvr>
+    <a:masterClrMapping/>
+  </p:clrMapOvr>
+  <mc:AlternateContent xmlns:mc="http://schemas.openxmlformats.org/markup-compatibility/2006" xmlns:p14="http://schemas.microsoft.com/office/powerpoint/2010/main">
+    <mc:Choice Requires="p14">
+      <p:transition spd="slow" p14:dur="2000" advTm="116713"/>
+    </mc:Choice>
+    <mc:Fallback xmlns="">
+      <p:transition spd="slow" advTm="116713"/>
+    </mc:Fallback>
+  </mc:AlternateContent>
+</p:sld>
+</file>
+
+<file path=ppt/slides/slide3.xml><?xml version="1.0" encoding="utf-8"?>
+<p:sld xmlns:a="http://schemas.openxmlformats.org/drawingml/2006/main" xmlns:r="http://schemas.openxmlformats.org/officeDocument/2006/relationships" xmlns:p="http://schemas.openxmlformats.org/presentationml/2006/main">
+  <p:cSld>
+    <p:spTree>
+      <p:nvGrpSpPr>
+        <p:cNvPr id="1" name="">
+          <a:extLst>
+            <a:ext uri="{FF2B5EF4-FFF2-40B4-BE49-F238E27FC236}">
+              <a16:creationId xmlns:a16="http://schemas.microsoft.com/office/drawing/2014/main" id="{DB837B88-AC5B-BB36-C643-F1B6F925D444}"/>
+            </a:ext>
+          </a:extLst>
+        </p:cNvPr>
+        <p:cNvGrpSpPr/>
+        <p:nvPr/>
+      </p:nvGrpSpPr>
+      <p:grpSpPr>
+        <a:xfrm>
+          <a:off x="0" y="0"/>
+          <a:ext cx="0" cy="0"/>
+          <a:chOff x="0" y="0"/>
+          <a:chExt cx="0" cy="0"/>
+        </a:xfrm>
+      </p:grpSpPr>
+      <p:sp>
+        <p:nvSpPr>
+          <p:cNvPr id="2" name="제목 1">
+            <a:extLst>
+              <a:ext uri="{FF2B5EF4-FFF2-40B4-BE49-F238E27FC236}">
+                <a16:creationId xmlns:a16="http://schemas.microsoft.com/office/drawing/2014/main" id="{AF4FF169-BD3A-7F72-BA8E-9DF65D87F001}"/>
+              </a:ext>
+            </a:extLst>
+          </p:cNvPr>
+          <p:cNvSpPr>
+            <a:spLocks noGrp="1"/>
+          </p:cNvSpPr>
+          <p:nvPr>
+            <p:ph type="title"/>
+          </p:nvPr>
+        </p:nvSpPr>
+        <p:spPr/>
+        <p:txBody>
+          <a:bodyPr/>
+          <a:lstStyle/>
+          <a:p>
+            <a:r>
+              <a:rPr lang="en-US" altLang="ko-KR" dirty="0">
+                <a:solidFill>
+                  <a:srgbClr val="2F5597"/>
+                </a:solidFill>
+              </a:rPr>
               <a:t>1.</a:t>
             </a:r>
             <a:r>
@@ -11994,7 +11874,7 @@
 </p:sld>
 </file>
 
-<file path=ppt/slides/slide3.xml><?xml version="1.0" encoding="utf-8"?>
+<file path=ppt/slides/slide4.xml><?xml version="1.0" encoding="utf-8"?>
 <p:sld xmlns:a="http://schemas.openxmlformats.org/drawingml/2006/main" xmlns:r="http://schemas.openxmlformats.org/officeDocument/2006/relationships" xmlns:p="http://schemas.openxmlformats.org/presentationml/2006/main">
   <p:cSld>
     <p:spTree>
@@ -24681,7 +24561,7 @@
 </p:sld>
 </file>
 
-<file path=ppt/slides/slide4.xml><?xml version="1.0" encoding="utf-8"?>
+<file path=ppt/slides/slide5.xml><?xml version="1.0" encoding="utf-8"?>
 <p:sld xmlns:a="http://schemas.openxmlformats.org/drawingml/2006/main" xmlns:r="http://schemas.openxmlformats.org/officeDocument/2006/relationships" xmlns:p="http://schemas.openxmlformats.org/presentationml/2006/main">
   <p:cSld>
     <p:spTree>
